--- a/Presentaties/Sprint 6.pptx
+++ b/Presentaties/Sprint 6.pptx
@@ -141,6 +141,200 @@
     </p:ext>
   </p:extLst>
 </p:presentation>
+</file>
+
+<file path=ppt/revisionInfo.xml><?xml version="1.0" encoding="utf-8"?>
+<p1510:revInfo xmlns:a="http://schemas.openxmlformats.org/drawingml/2006/main" xmlns:r="http://schemas.openxmlformats.org/officeDocument/2006/relationships" xmlns:p1510="http://schemas.microsoft.com/office/powerpoint/2015/10/main">
+  <p1510:revLst>
+    <p1510:client id="{450C40C7-85B7-4CB0-84F5-A872F4260D02}" v="8" dt="2026-01-06T12:35:52.088"/>
+  </p1510:revLst>
+</p1510:revInfo>
+</file>
+
+<file path=ppt/changesInfos/changesInfo1.xml><?xml version="1.0" encoding="utf-8"?>
+<pc:chgInfo xmlns:a="http://schemas.openxmlformats.org/drawingml/2006/main" xmlns:r="http://schemas.openxmlformats.org/officeDocument/2006/relationships" xmlns:ac="http://schemas.microsoft.com/office/drawing/2013/main/command" xmlns:pc="http://schemas.microsoft.com/office/powerpoint/2013/main/command">
+  <pc:docChgLst>
+    <pc:chgData name="Dax Visser (1110166)" userId="18ef0d71-56ab-4448-86a5-7ac2420fc301" providerId="ADAL" clId="{450C40C7-85B7-4CB0-84F5-A872F4260D02}"/>
+    <pc:docChg chg="undo custSel modSld">
+      <pc:chgData name="Dax Visser (1110166)" userId="18ef0d71-56ab-4448-86a5-7ac2420fc301" providerId="ADAL" clId="{450C40C7-85B7-4CB0-84F5-A872F4260D02}" dt="2026-01-06T12:51:50.263" v="21" actId="26606"/>
+      <pc:docMkLst>
+        <pc:docMk/>
+      </pc:docMkLst>
+      <pc:sldChg chg="modSp">
+        <pc:chgData name="Dax Visser (1110166)" userId="18ef0d71-56ab-4448-86a5-7ac2420fc301" providerId="ADAL" clId="{450C40C7-85B7-4CB0-84F5-A872F4260D02}" dt="2026-01-06T12:35:52.087" v="7" actId="20577"/>
+        <pc:sldMkLst>
+          <pc:docMk/>
+          <pc:sldMk cId="561624698" sldId="257"/>
+        </pc:sldMkLst>
+        <pc:graphicFrameChg chg="mod">
+          <ac:chgData name="Dax Visser (1110166)" userId="18ef0d71-56ab-4448-86a5-7ac2420fc301" providerId="ADAL" clId="{450C40C7-85B7-4CB0-84F5-A872F4260D02}" dt="2026-01-06T12:35:52.087" v="7" actId="20577"/>
+          <ac:graphicFrameMkLst>
+            <pc:docMk/>
+            <pc:sldMk cId="561624698" sldId="257"/>
+            <ac:graphicFrameMk id="5" creationId="{FE64420E-8580-DE79-BAC2-DC432FEEDB42}"/>
+          </ac:graphicFrameMkLst>
+        </pc:graphicFrameChg>
+      </pc:sldChg>
+      <pc:sldChg chg="modSp mod">
+        <pc:chgData name="Dax Visser (1110166)" userId="18ef0d71-56ab-4448-86a5-7ac2420fc301" providerId="ADAL" clId="{450C40C7-85B7-4CB0-84F5-A872F4260D02}" dt="2026-01-06T12:48:55.634" v="8" actId="20577"/>
+        <pc:sldMkLst>
+          <pc:docMk/>
+          <pc:sldMk cId="4184478922" sldId="258"/>
+        </pc:sldMkLst>
+        <pc:spChg chg="mod">
+          <ac:chgData name="Dax Visser (1110166)" userId="18ef0d71-56ab-4448-86a5-7ac2420fc301" providerId="ADAL" clId="{450C40C7-85B7-4CB0-84F5-A872F4260D02}" dt="2026-01-06T12:48:55.634" v="8" actId="20577"/>
+          <ac:spMkLst>
+            <pc:docMk/>
+            <pc:sldMk cId="4184478922" sldId="258"/>
+            <ac:spMk id="3" creationId="{027EC2D2-23D9-2582-009F-C9AA32E67A48}"/>
+          </ac:spMkLst>
+        </pc:spChg>
+      </pc:sldChg>
+      <pc:sldChg chg="addSp delSp modSp mod setBg">
+        <pc:chgData name="Dax Visser (1110166)" userId="18ef0d71-56ab-4448-86a5-7ac2420fc301" providerId="ADAL" clId="{450C40C7-85B7-4CB0-84F5-A872F4260D02}" dt="2026-01-06T12:51:50.263" v="21" actId="26606"/>
+        <pc:sldMkLst>
+          <pc:docMk/>
+          <pc:sldMk cId="3103718938" sldId="264"/>
+        </pc:sldMkLst>
+        <pc:spChg chg="mod">
+          <ac:chgData name="Dax Visser (1110166)" userId="18ef0d71-56ab-4448-86a5-7ac2420fc301" providerId="ADAL" clId="{450C40C7-85B7-4CB0-84F5-A872F4260D02}" dt="2026-01-06T12:51:50.263" v="21" actId="26606"/>
+          <ac:spMkLst>
+            <pc:docMk/>
+            <pc:sldMk cId="3103718938" sldId="264"/>
+            <ac:spMk id="2" creationId="{2CB8C221-29AC-C68A-DE18-FFAB64C299EB}"/>
+          </ac:spMkLst>
+        </pc:spChg>
+        <pc:spChg chg="del">
+          <ac:chgData name="Dax Visser (1110166)" userId="18ef0d71-56ab-4448-86a5-7ac2420fc301" providerId="ADAL" clId="{450C40C7-85B7-4CB0-84F5-A872F4260D02}" dt="2026-01-06T12:51:41.052" v="16" actId="478"/>
+          <ac:spMkLst>
+            <pc:docMk/>
+            <pc:sldMk cId="3103718938" sldId="264"/>
+            <ac:spMk id="3" creationId="{768CC878-EE76-9B51-B735-FB5D5DFB94BA}"/>
+          </ac:spMkLst>
+        </pc:spChg>
+        <pc:spChg chg="add del">
+          <ac:chgData name="Dax Visser (1110166)" userId="18ef0d71-56ab-4448-86a5-7ac2420fc301" providerId="ADAL" clId="{450C40C7-85B7-4CB0-84F5-A872F4260D02}" dt="2026-01-06T12:51:50.243" v="20" actId="26606"/>
+          <ac:spMkLst>
+            <pc:docMk/>
+            <pc:sldMk cId="3103718938" sldId="264"/>
+            <ac:spMk id="10" creationId="{0DC895F7-4E59-40FB-87DD-ACE47F94C143}"/>
+          </ac:spMkLst>
+        </pc:spChg>
+        <pc:picChg chg="add del">
+          <ac:chgData name="Dax Visser (1110166)" userId="18ef0d71-56ab-4448-86a5-7ac2420fc301" providerId="ADAL" clId="{450C40C7-85B7-4CB0-84F5-A872F4260D02}" dt="2026-01-06T12:51:50.243" v="20" actId="26606"/>
+          <ac:picMkLst>
+            <pc:docMk/>
+            <pc:sldMk cId="3103718938" sldId="264"/>
+            <ac:picMk id="4" creationId="{2545E8FD-39C0-D646-BD3D-4341A22B245A}"/>
+          </ac:picMkLst>
+        </pc:picChg>
+        <pc:picChg chg="add del">
+          <ac:chgData name="Dax Visser (1110166)" userId="18ef0d71-56ab-4448-86a5-7ac2420fc301" providerId="ADAL" clId="{450C40C7-85B7-4CB0-84F5-A872F4260D02}" dt="2026-01-06T12:51:48.798" v="18" actId="26606"/>
+          <ac:picMkLst>
+            <pc:docMk/>
+            <pc:sldMk cId="3103718938" sldId="264"/>
+            <ac:picMk id="6" creationId="{6D8AFA5B-3EBC-07DF-350D-E4D5F5C9BD38}"/>
+          </ac:picMkLst>
+        </pc:picChg>
+        <pc:picChg chg="add del">
+          <ac:chgData name="Dax Visser (1110166)" userId="18ef0d71-56ab-4448-86a5-7ac2420fc301" providerId="ADAL" clId="{450C40C7-85B7-4CB0-84F5-A872F4260D02}" dt="2026-01-06T12:51:50.243" v="20" actId="26606"/>
+          <ac:picMkLst>
+            <pc:docMk/>
+            <pc:sldMk cId="3103718938" sldId="264"/>
+            <ac:picMk id="8" creationId="{CBECFFDC-94DB-4DA3-94FE-22FEDDA8FA30}"/>
+          </ac:picMkLst>
+        </pc:picChg>
+        <pc:picChg chg="add del">
+          <ac:chgData name="Dax Visser (1110166)" userId="18ef0d71-56ab-4448-86a5-7ac2420fc301" providerId="ADAL" clId="{450C40C7-85B7-4CB0-84F5-A872F4260D02}" dt="2026-01-06T12:51:48.798" v="18" actId="26606"/>
+          <ac:picMkLst>
+            <pc:docMk/>
+            <pc:sldMk cId="3103718938" sldId="264"/>
+            <ac:picMk id="9" creationId="{6AF6706C-CF07-43A1-BCC4-CBA5D33820DA}"/>
+          </ac:picMkLst>
+        </pc:picChg>
+        <pc:picChg chg="add del">
+          <ac:chgData name="Dax Visser (1110166)" userId="18ef0d71-56ab-4448-86a5-7ac2420fc301" providerId="ADAL" clId="{450C40C7-85B7-4CB0-84F5-A872F4260D02}" dt="2026-01-06T12:51:50.243" v="20" actId="26606"/>
+          <ac:picMkLst>
+            <pc:docMk/>
+            <pc:sldMk cId="3103718938" sldId="264"/>
+            <ac:picMk id="12" creationId="{1A4C720E-710D-44F8-A8D7-2BAA61E1814B}"/>
+          </ac:picMkLst>
+        </pc:picChg>
+        <pc:picChg chg="add">
+          <ac:chgData name="Dax Visser (1110166)" userId="18ef0d71-56ab-4448-86a5-7ac2420fc301" providerId="ADAL" clId="{450C40C7-85B7-4CB0-84F5-A872F4260D02}" dt="2026-01-06T12:51:50.263" v="21" actId="26606"/>
+          <ac:picMkLst>
+            <pc:docMk/>
+            <pc:sldMk cId="3103718938" sldId="264"/>
+            <ac:picMk id="14" creationId="{6AF6706C-CF07-43A1-BCC4-CBA5D33820DA}"/>
+          </ac:picMkLst>
+        </pc:picChg>
+        <pc:picChg chg="add">
+          <ac:chgData name="Dax Visser (1110166)" userId="18ef0d71-56ab-4448-86a5-7ac2420fc301" providerId="ADAL" clId="{450C40C7-85B7-4CB0-84F5-A872F4260D02}" dt="2026-01-06T12:51:50.263" v="21" actId="26606"/>
+          <ac:picMkLst>
+            <pc:docMk/>
+            <pc:sldMk cId="3103718938" sldId="264"/>
+            <ac:picMk id="15" creationId="{6D8AFA5B-3EBC-07DF-350D-E4D5F5C9BD38}"/>
+          </ac:picMkLst>
+        </pc:picChg>
+      </pc:sldChg>
+      <pc:sldChg chg="addSp delSp modSp mod setBg">
+        <pc:chgData name="Dax Visser (1110166)" userId="18ef0d71-56ab-4448-86a5-7ac2420fc301" providerId="ADAL" clId="{450C40C7-85B7-4CB0-84F5-A872F4260D02}" dt="2026-01-06T12:50:17.684" v="15" actId="26606"/>
+        <pc:sldMkLst>
+          <pc:docMk/>
+          <pc:sldMk cId="218041867" sldId="272"/>
+        </pc:sldMkLst>
+        <pc:spChg chg="mod">
+          <ac:chgData name="Dax Visser (1110166)" userId="18ef0d71-56ab-4448-86a5-7ac2420fc301" providerId="ADAL" clId="{450C40C7-85B7-4CB0-84F5-A872F4260D02}" dt="2026-01-06T12:50:17.684" v="15" actId="26606"/>
+          <ac:spMkLst>
+            <pc:docMk/>
+            <pc:sldMk cId="218041867" sldId="272"/>
+            <ac:spMk id="2" creationId="{AE154AE4-5C95-62BE-2D21-723C585804C9}"/>
+          </ac:spMkLst>
+        </pc:spChg>
+        <pc:spChg chg="add del">
+          <ac:chgData name="Dax Visser (1110166)" userId="18ef0d71-56ab-4448-86a5-7ac2420fc301" providerId="ADAL" clId="{450C40C7-85B7-4CB0-84F5-A872F4260D02}" dt="2026-01-06T12:50:01.629" v="10" actId="26606"/>
+          <ac:spMkLst>
+            <pc:docMk/>
+            <pc:sldMk cId="218041867" sldId="272"/>
+            <ac:spMk id="10" creationId="{7C4BDB12-373D-738D-AF53-F8A7AC1B02CB}"/>
+          </ac:spMkLst>
+        </pc:spChg>
+        <pc:spChg chg="add del">
+          <ac:chgData name="Dax Visser (1110166)" userId="18ef0d71-56ab-4448-86a5-7ac2420fc301" providerId="ADAL" clId="{450C40C7-85B7-4CB0-84F5-A872F4260D02}" dt="2026-01-06T12:50:08.570" v="12" actId="26606"/>
+          <ac:spMkLst>
+            <pc:docMk/>
+            <pc:sldMk cId="218041867" sldId="272"/>
+            <ac:spMk id="12" creationId="{FA8F8254-683F-9393-9CE1-5BAE4992FAC9}"/>
+          </ac:spMkLst>
+        </pc:spChg>
+        <pc:spChg chg="add del">
+          <ac:chgData name="Dax Visser (1110166)" userId="18ef0d71-56ab-4448-86a5-7ac2420fc301" providerId="ADAL" clId="{450C40C7-85B7-4CB0-84F5-A872F4260D02}" dt="2026-01-06T12:50:13.938" v="14" actId="478"/>
+          <ac:spMkLst>
+            <pc:docMk/>
+            <pc:sldMk cId="218041867" sldId="272"/>
+            <ac:spMk id="14" creationId="{EFD79533-EA07-5C1F-BDC1-743BDE7A6F25}"/>
+          </ac:spMkLst>
+        </pc:spChg>
+        <pc:picChg chg="mod">
+          <ac:chgData name="Dax Visser (1110166)" userId="18ef0d71-56ab-4448-86a5-7ac2420fc301" providerId="ADAL" clId="{450C40C7-85B7-4CB0-84F5-A872F4260D02}" dt="2026-01-06T12:50:17.684" v="15" actId="26606"/>
+          <ac:picMkLst>
+            <pc:docMk/>
+            <pc:sldMk cId="218041867" sldId="272"/>
+            <ac:picMk id="6" creationId="{8F3450A3-0336-6B3F-4878-0397B7DA9310}"/>
+          </ac:picMkLst>
+        </pc:picChg>
+        <pc:picChg chg="add">
+          <ac:chgData name="Dax Visser (1110166)" userId="18ef0d71-56ab-4448-86a5-7ac2420fc301" providerId="ADAL" clId="{450C40C7-85B7-4CB0-84F5-A872F4260D02}" dt="2026-01-06T12:50:17.684" v="15" actId="26606"/>
+          <ac:picMkLst>
+            <pc:docMk/>
+            <pc:sldMk cId="218041867" sldId="272"/>
+            <ac:picMk id="11" creationId="{6AF6706C-CF07-43A1-BCC4-CBA5D33820DA}"/>
+          </ac:picMkLst>
+        </pc:picChg>
+      </pc:sldChg>
+    </pc:docChg>
+  </pc:docChgLst>
+</pc:chgInfo>
 </file>
 
 <file path=ppt/diagrams/colors1.xml><?xml version="1.0" encoding="utf-8"?>
@@ -929,7 +1123,7 @@
 <dgm:dataModel xmlns:dgm="http://schemas.openxmlformats.org/drawingml/2006/diagram" xmlns:a="http://schemas.openxmlformats.org/drawingml/2006/main">
   <dgm:ptLst>
     <dgm:pt modelId="{67DA44AA-7B44-4C6A-8E45-1D4360E100E0}" type="doc">
-      <dgm:prSet loTypeId="urn:microsoft.com/office/officeart/2008/layout/LinedList" loCatId="list" qsTypeId="urn:microsoft.com/office/officeart/2005/8/quickstyle/simple4" qsCatId="simple" csTypeId="urn:microsoft.com/office/officeart/2005/8/colors/colorful2" csCatId="colorful"/>
+      <dgm:prSet loTypeId="urn:microsoft.com/office/officeart/2008/layout/LinedList" loCatId="list" qsTypeId="urn:microsoft.com/office/officeart/2005/8/quickstyle/simple4" qsCatId="simple" csTypeId="urn:microsoft.com/office/officeart/2005/8/colors/colorful2" csCatId="colorful" phldr="1"/>
       <dgm:spPr/>
       <dgm:t>
         <a:bodyPr/>
@@ -984,10 +1178,14 @@
         <a:lstStyle/>
         <a:p>
           <a:r>
-            <a:rPr lang="nl-NL"/>
-            <a:t>Demo’s</a:t>
+            <a:rPr lang="nl-NL" dirty="0"/>
+            <a:t>Voortgang user </a:t>
           </a:r>
-          <a:endParaRPr lang="en-US"/>
+          <a:r>
+            <a:rPr lang="nl-NL" dirty="0" err="1"/>
+            <a:t>stories</a:t>
+          </a:r>
+          <a:endParaRPr lang="en-US" dirty="0"/>
         </a:p>
       </dgm:t>
     </dgm:pt>
@@ -1013,43 +1211,6 @@
         </a:p>
       </dgm:t>
     </dgm:pt>
-    <dgm:pt modelId="{4EB9CECA-F548-41EA-8D74-27BCA268BEC8}">
-      <dgm:prSet/>
-      <dgm:spPr/>
-      <dgm:t>
-        <a:bodyPr/>
-        <a:lstStyle/>
-        <a:p>
-          <a:r>
-            <a:rPr lang="nl-NL"/>
-            <a:t>Voortgang user stories</a:t>
-          </a:r>
-          <a:endParaRPr lang="en-US"/>
-        </a:p>
-      </dgm:t>
-    </dgm:pt>
-    <dgm:pt modelId="{263AE03A-BA95-45DB-8675-A7B4F7E0DE4E}" type="parTrans" cxnId="{F5BE37AC-5E91-431D-BCA7-6F16C0D3D7F7}">
-      <dgm:prSet/>
-      <dgm:spPr/>
-      <dgm:t>
-        <a:bodyPr/>
-        <a:lstStyle/>
-        <a:p>
-          <a:endParaRPr lang="en-US"/>
-        </a:p>
-      </dgm:t>
-    </dgm:pt>
-    <dgm:pt modelId="{7544B1B7-6704-4DD7-BD3A-D91E59E728E3}" type="sibTrans" cxnId="{F5BE37AC-5E91-431D-BCA7-6F16C0D3D7F7}">
-      <dgm:prSet/>
-      <dgm:spPr/>
-      <dgm:t>
-        <a:bodyPr/>
-        <a:lstStyle/>
-        <a:p>
-          <a:endParaRPr lang="en-US"/>
-        </a:p>
-      </dgm:t>
-    </dgm:pt>
     <dgm:pt modelId="{B06F7A36-16A3-4FB7-A6F2-5EE5F845E2A0}">
       <dgm:prSet/>
       <dgm:spPr/>
@@ -1058,10 +1219,10 @@
         <a:lstStyle/>
         <a:p>
           <a:r>
-            <a:rPr lang="nl-NL"/>
+            <a:rPr lang="nl-NL" dirty="0" err="1"/>
             <a:t>Retrospective</a:t>
           </a:r>
-          <a:endParaRPr lang="en-US"/>
+          <a:endParaRPr lang="en-US" dirty="0"/>
         </a:p>
       </dgm:t>
     </dgm:pt>
@@ -1095,10 +1256,10 @@
         <a:lstStyle/>
         <a:p>
           <a:r>
-            <a:rPr lang="nl-NL"/>
+            <a:rPr lang="nl-NL" dirty="0"/>
             <a:t>Volgende Sprint</a:t>
           </a:r>
-          <a:endParaRPr lang="en-US"/>
+          <a:endParaRPr lang="en-US" dirty="0"/>
         </a:p>
       </dgm:t>
     </dgm:pt>
@@ -1135,7 +1296,7 @@
       <dgm:spPr/>
     </dgm:pt>
     <dgm:pt modelId="{49B59DA5-7B4B-42CE-8046-C2F335250FCC}" type="pres">
-      <dgm:prSet presAssocID="{F1041D84-036D-4C99-9F44-6591B12AF9AD}" presName="thickLine" presStyleLbl="alignNode1" presStyleIdx="0" presStyleCnt="5"/>
+      <dgm:prSet presAssocID="{F1041D84-036D-4C99-9F44-6591B12AF9AD}" presName="thickLine" presStyleLbl="alignNode1" presStyleIdx="0" presStyleCnt="4"/>
       <dgm:spPr/>
     </dgm:pt>
     <dgm:pt modelId="{AC131272-9CCE-4D83-8594-92EF6523BC42}" type="pres">
@@ -1143,7 +1304,7 @@
       <dgm:spPr/>
     </dgm:pt>
     <dgm:pt modelId="{40848A1C-09E6-45A3-B202-2941E4141F6A}" type="pres">
-      <dgm:prSet presAssocID="{F1041D84-036D-4C99-9F44-6591B12AF9AD}" presName="tx1" presStyleLbl="revTx" presStyleIdx="0" presStyleCnt="5"/>
+      <dgm:prSet presAssocID="{F1041D84-036D-4C99-9F44-6591B12AF9AD}" presName="tx1" presStyleLbl="revTx" presStyleIdx="0" presStyleCnt="4"/>
       <dgm:spPr/>
     </dgm:pt>
     <dgm:pt modelId="{B86EF985-4AFB-4011-A22D-AA7E0435CDCC}" type="pres">
@@ -1151,7 +1312,7 @@
       <dgm:spPr/>
     </dgm:pt>
     <dgm:pt modelId="{AFAE369B-725F-4660-958B-1185EC50D468}" type="pres">
-      <dgm:prSet presAssocID="{6395127E-9425-4E4D-A825-6DE9888D5708}" presName="thickLine" presStyleLbl="alignNode1" presStyleIdx="1" presStyleCnt="5"/>
+      <dgm:prSet presAssocID="{6395127E-9425-4E4D-A825-6DE9888D5708}" presName="thickLine" presStyleLbl="alignNode1" presStyleIdx="1" presStyleCnt="4"/>
       <dgm:spPr/>
     </dgm:pt>
     <dgm:pt modelId="{2D574E48-CF93-48E5-854A-CD970C54B46B}" type="pres">
@@ -1159,31 +1320,15 @@
       <dgm:spPr/>
     </dgm:pt>
     <dgm:pt modelId="{9083DD31-3468-419C-9D06-BFAA4284E75C}" type="pres">
-      <dgm:prSet presAssocID="{6395127E-9425-4E4D-A825-6DE9888D5708}" presName="tx1" presStyleLbl="revTx" presStyleIdx="1" presStyleCnt="5"/>
+      <dgm:prSet presAssocID="{6395127E-9425-4E4D-A825-6DE9888D5708}" presName="tx1" presStyleLbl="revTx" presStyleIdx="1" presStyleCnt="4"/>
       <dgm:spPr/>
     </dgm:pt>
     <dgm:pt modelId="{531F0789-D21E-427C-9B97-D38D20C6D3E3}" type="pres">
       <dgm:prSet presAssocID="{6395127E-9425-4E4D-A825-6DE9888D5708}" presName="vert1" presStyleCnt="0"/>
       <dgm:spPr/>
     </dgm:pt>
-    <dgm:pt modelId="{CB7E08E1-7F1A-42DF-9E7C-67B68821F510}" type="pres">
-      <dgm:prSet presAssocID="{4EB9CECA-F548-41EA-8D74-27BCA268BEC8}" presName="thickLine" presStyleLbl="alignNode1" presStyleIdx="2" presStyleCnt="5"/>
-      <dgm:spPr/>
-    </dgm:pt>
-    <dgm:pt modelId="{D7DED5B1-C9FB-4F12-AC8D-6573E0522D23}" type="pres">
-      <dgm:prSet presAssocID="{4EB9CECA-F548-41EA-8D74-27BCA268BEC8}" presName="horz1" presStyleCnt="0"/>
-      <dgm:spPr/>
-    </dgm:pt>
-    <dgm:pt modelId="{BB4110CE-082E-4CF5-A870-379EADDF9829}" type="pres">
-      <dgm:prSet presAssocID="{4EB9CECA-F548-41EA-8D74-27BCA268BEC8}" presName="tx1" presStyleLbl="revTx" presStyleIdx="2" presStyleCnt="5"/>
-      <dgm:spPr/>
-    </dgm:pt>
-    <dgm:pt modelId="{6218ED1B-36BC-4AD8-A79A-8EDBF3181C6D}" type="pres">
-      <dgm:prSet presAssocID="{4EB9CECA-F548-41EA-8D74-27BCA268BEC8}" presName="vert1" presStyleCnt="0"/>
-      <dgm:spPr/>
-    </dgm:pt>
     <dgm:pt modelId="{C35132EF-1B63-49A9-B24F-8D83F6AC78E8}" type="pres">
-      <dgm:prSet presAssocID="{B06F7A36-16A3-4FB7-A6F2-5EE5F845E2A0}" presName="thickLine" presStyleLbl="alignNode1" presStyleIdx="3" presStyleCnt="5"/>
+      <dgm:prSet presAssocID="{B06F7A36-16A3-4FB7-A6F2-5EE5F845E2A0}" presName="thickLine" presStyleLbl="alignNode1" presStyleIdx="2" presStyleCnt="4"/>
       <dgm:spPr/>
     </dgm:pt>
     <dgm:pt modelId="{6F4B6D39-E6D9-4B1B-BCA0-3F469DF9A6B1}" type="pres">
@@ -1191,7 +1336,7 @@
       <dgm:spPr/>
     </dgm:pt>
     <dgm:pt modelId="{DFF207D5-F365-444F-9CC7-E6C594A14B1B}" type="pres">
-      <dgm:prSet presAssocID="{B06F7A36-16A3-4FB7-A6F2-5EE5F845E2A0}" presName="tx1" presStyleLbl="revTx" presStyleIdx="3" presStyleCnt="5"/>
+      <dgm:prSet presAssocID="{B06F7A36-16A3-4FB7-A6F2-5EE5F845E2A0}" presName="tx1" presStyleLbl="revTx" presStyleIdx="2" presStyleCnt="4"/>
       <dgm:spPr/>
     </dgm:pt>
     <dgm:pt modelId="{565CA483-617D-4ED4-8260-249D8684425F}" type="pres">
@@ -1199,7 +1344,7 @@
       <dgm:spPr/>
     </dgm:pt>
     <dgm:pt modelId="{0D5CEFA3-BEB2-479F-997C-27FBFB20ADC6}" type="pres">
-      <dgm:prSet presAssocID="{774E9802-F0ED-4251-ACFD-96C2E4BE2B81}" presName="thickLine" presStyleLbl="alignNode1" presStyleIdx="4" presStyleCnt="5"/>
+      <dgm:prSet presAssocID="{774E9802-F0ED-4251-ACFD-96C2E4BE2B81}" presName="thickLine" presStyleLbl="alignNode1" presStyleIdx="3" presStyleCnt="4"/>
       <dgm:spPr/>
     </dgm:pt>
     <dgm:pt modelId="{96BBC346-FA44-4ACD-8AD0-CD5D28783017}" type="pres">
@@ -1207,7 +1352,7 @@
       <dgm:spPr/>
     </dgm:pt>
     <dgm:pt modelId="{C78AF888-B2B8-4AA9-B27F-70EFB4BEE8CF}" type="pres">
-      <dgm:prSet presAssocID="{774E9802-F0ED-4251-ACFD-96C2E4BE2B81}" presName="tx1" presStyleLbl="revTx" presStyleIdx="4" presStyleCnt="5"/>
+      <dgm:prSet presAssocID="{774E9802-F0ED-4251-ACFD-96C2E4BE2B81}" presName="tx1" presStyleLbl="revTx" presStyleIdx="3" presStyleCnt="4"/>
       <dgm:spPr/>
     </dgm:pt>
     <dgm:pt modelId="{8C4BC65B-974C-448E-8D90-9BA7AD5DC01E}" type="pres">
@@ -1218,13 +1363,11 @@
   <dgm:cxnLst>
     <dgm:cxn modelId="{16F3DE1B-2CC7-4E91-BF46-7B0285B3D6C9}" type="presOf" srcId="{67DA44AA-7B44-4C6A-8E45-1D4360E100E0}" destId="{3864E01A-4732-458C-A7E4-C8D804A0389B}" srcOrd="0" destOrd="0" presId="urn:microsoft.com/office/officeart/2008/layout/LinedList"/>
     <dgm:cxn modelId="{83CC2227-1390-4EB6-86B4-2526AA2D24D9}" type="presOf" srcId="{774E9802-F0ED-4251-ACFD-96C2E4BE2B81}" destId="{C78AF888-B2B8-4AA9-B27F-70EFB4BEE8CF}" srcOrd="0" destOrd="0" presId="urn:microsoft.com/office/officeart/2008/layout/LinedList"/>
-    <dgm:cxn modelId="{2A85D742-EF0E-40C9-9790-CE7A8BE3AD25}" srcId="{67DA44AA-7B44-4C6A-8E45-1D4360E100E0}" destId="{774E9802-F0ED-4251-ACFD-96C2E4BE2B81}" srcOrd="4" destOrd="0" parTransId="{9FA6954E-0BBC-405F-89CC-A8CDC366307F}" sibTransId="{FBBB005E-76D7-4295-A905-DD5C8267DDE3}"/>
+    <dgm:cxn modelId="{2A85D742-EF0E-40C9-9790-CE7A8BE3AD25}" srcId="{67DA44AA-7B44-4C6A-8E45-1D4360E100E0}" destId="{774E9802-F0ED-4251-ACFD-96C2E4BE2B81}" srcOrd="3" destOrd="0" parTransId="{9FA6954E-0BBC-405F-89CC-A8CDC366307F}" sibTransId="{FBBB005E-76D7-4295-A905-DD5C8267DDE3}"/>
     <dgm:cxn modelId="{9FA5F663-1089-49DF-90DE-EFEC76EACA99}" type="presOf" srcId="{F1041D84-036D-4C99-9F44-6591B12AF9AD}" destId="{40848A1C-09E6-45A3-B202-2941E4141F6A}" srcOrd="0" destOrd="0" presId="urn:microsoft.com/office/officeart/2008/layout/LinedList"/>
     <dgm:cxn modelId="{7489E248-1A07-4FAD-88FA-5E066E50E256}" type="presOf" srcId="{6395127E-9425-4E4D-A825-6DE9888D5708}" destId="{9083DD31-3468-419C-9D06-BFAA4284E75C}" srcOrd="0" destOrd="0" presId="urn:microsoft.com/office/officeart/2008/layout/LinedList"/>
     <dgm:cxn modelId="{8BAB5D6A-2E83-4D8D-B5FD-F2F903F4931C}" srcId="{67DA44AA-7B44-4C6A-8E45-1D4360E100E0}" destId="{6395127E-9425-4E4D-A825-6DE9888D5708}" srcOrd="1" destOrd="0" parTransId="{D37EE379-4C3E-4BE2-9DBB-37AD4EBEF7A3}" sibTransId="{4B73D859-E836-4727-B5BB-6E4C2028B132}"/>
-    <dgm:cxn modelId="{67B933A1-0AE5-4C4D-A0B5-EBE0A80A2588}" srcId="{67DA44AA-7B44-4C6A-8E45-1D4360E100E0}" destId="{B06F7A36-16A3-4FB7-A6F2-5EE5F845E2A0}" srcOrd="3" destOrd="0" parTransId="{460049E4-946F-4E75-B49F-8568321AA4FE}" sibTransId="{E8B0655A-53FC-4E6E-82E3-745952A7FFA9}"/>
-    <dgm:cxn modelId="{F5BE37AC-5E91-431D-BCA7-6F16C0D3D7F7}" srcId="{67DA44AA-7B44-4C6A-8E45-1D4360E100E0}" destId="{4EB9CECA-F548-41EA-8D74-27BCA268BEC8}" srcOrd="2" destOrd="0" parTransId="{263AE03A-BA95-45DB-8675-A7B4F7E0DE4E}" sibTransId="{7544B1B7-6704-4DD7-BD3A-D91E59E728E3}"/>
-    <dgm:cxn modelId="{8804CFC0-CFF2-4B99-A5DF-26FDF7D3423C}" type="presOf" srcId="{4EB9CECA-F548-41EA-8D74-27BCA268BEC8}" destId="{BB4110CE-082E-4CF5-A870-379EADDF9829}" srcOrd="0" destOrd="0" presId="urn:microsoft.com/office/officeart/2008/layout/LinedList"/>
+    <dgm:cxn modelId="{67B933A1-0AE5-4C4D-A0B5-EBE0A80A2588}" srcId="{67DA44AA-7B44-4C6A-8E45-1D4360E100E0}" destId="{B06F7A36-16A3-4FB7-A6F2-5EE5F845E2A0}" srcOrd="2" destOrd="0" parTransId="{460049E4-946F-4E75-B49F-8568321AA4FE}" sibTransId="{E8B0655A-53FC-4E6E-82E3-745952A7FFA9}"/>
     <dgm:cxn modelId="{44F21DE2-BDCE-46D0-88F6-F0561C284F17}" srcId="{67DA44AA-7B44-4C6A-8E45-1D4360E100E0}" destId="{F1041D84-036D-4C99-9F44-6591B12AF9AD}" srcOrd="0" destOrd="0" parTransId="{B322792F-B228-47DD-A19E-4417979C5367}" sibTransId="{FE32F3CE-8862-453C-A83C-E6C4CC10271F}"/>
     <dgm:cxn modelId="{07141FF8-9303-41E4-B4B1-3886EB6533CA}" type="presOf" srcId="{B06F7A36-16A3-4FB7-A6F2-5EE5F845E2A0}" destId="{DFF207D5-F365-444F-9CC7-E6C594A14B1B}" srcOrd="0" destOrd="0" presId="urn:microsoft.com/office/officeart/2008/layout/LinedList"/>
     <dgm:cxn modelId="{7106D1B3-51EF-4C5C-B649-3AFD1F84CBB6}" type="presParOf" srcId="{3864E01A-4732-458C-A7E4-C8D804A0389B}" destId="{49B59DA5-7B4B-42CE-8046-C2F335250FCC}" srcOrd="0" destOrd="0" presId="urn:microsoft.com/office/officeart/2008/layout/LinedList"/>
@@ -1235,16 +1378,12 @@
     <dgm:cxn modelId="{7EEDB6EE-C78C-4ADF-B112-D693E4C0750E}" type="presParOf" srcId="{3864E01A-4732-458C-A7E4-C8D804A0389B}" destId="{2D574E48-CF93-48E5-854A-CD970C54B46B}" srcOrd="3" destOrd="0" presId="urn:microsoft.com/office/officeart/2008/layout/LinedList"/>
     <dgm:cxn modelId="{429CA191-44CF-42B1-B64E-38B99E905818}" type="presParOf" srcId="{2D574E48-CF93-48E5-854A-CD970C54B46B}" destId="{9083DD31-3468-419C-9D06-BFAA4284E75C}" srcOrd="0" destOrd="0" presId="urn:microsoft.com/office/officeart/2008/layout/LinedList"/>
     <dgm:cxn modelId="{3E3B636E-D1C5-4AD4-8443-4EE473CC129E}" type="presParOf" srcId="{2D574E48-CF93-48E5-854A-CD970C54B46B}" destId="{531F0789-D21E-427C-9B97-D38D20C6D3E3}" srcOrd="1" destOrd="0" presId="urn:microsoft.com/office/officeart/2008/layout/LinedList"/>
-    <dgm:cxn modelId="{C88A147B-E483-4089-B599-506A69C996C4}" type="presParOf" srcId="{3864E01A-4732-458C-A7E4-C8D804A0389B}" destId="{CB7E08E1-7F1A-42DF-9E7C-67B68821F510}" srcOrd="4" destOrd="0" presId="urn:microsoft.com/office/officeart/2008/layout/LinedList"/>
-    <dgm:cxn modelId="{5FA7ECB8-69FE-4D87-B4E5-7B654C99B66D}" type="presParOf" srcId="{3864E01A-4732-458C-A7E4-C8D804A0389B}" destId="{D7DED5B1-C9FB-4F12-AC8D-6573E0522D23}" srcOrd="5" destOrd="0" presId="urn:microsoft.com/office/officeart/2008/layout/LinedList"/>
-    <dgm:cxn modelId="{5AB6E121-9BCB-415C-AB98-1113D5F0F0FF}" type="presParOf" srcId="{D7DED5B1-C9FB-4F12-AC8D-6573E0522D23}" destId="{BB4110CE-082E-4CF5-A870-379EADDF9829}" srcOrd="0" destOrd="0" presId="urn:microsoft.com/office/officeart/2008/layout/LinedList"/>
-    <dgm:cxn modelId="{D109887D-78D0-4687-ABDD-5926B0A3EB42}" type="presParOf" srcId="{D7DED5B1-C9FB-4F12-AC8D-6573E0522D23}" destId="{6218ED1B-36BC-4AD8-A79A-8EDBF3181C6D}" srcOrd="1" destOrd="0" presId="urn:microsoft.com/office/officeart/2008/layout/LinedList"/>
-    <dgm:cxn modelId="{5BE1F15C-C3B8-48B1-8B29-44F7372E5ED4}" type="presParOf" srcId="{3864E01A-4732-458C-A7E4-C8D804A0389B}" destId="{C35132EF-1B63-49A9-B24F-8D83F6AC78E8}" srcOrd="6" destOrd="0" presId="urn:microsoft.com/office/officeart/2008/layout/LinedList"/>
-    <dgm:cxn modelId="{21E515BD-F8E8-43FD-949F-17CE09CF3B0B}" type="presParOf" srcId="{3864E01A-4732-458C-A7E4-C8D804A0389B}" destId="{6F4B6D39-E6D9-4B1B-BCA0-3F469DF9A6B1}" srcOrd="7" destOrd="0" presId="urn:microsoft.com/office/officeart/2008/layout/LinedList"/>
+    <dgm:cxn modelId="{5BE1F15C-C3B8-48B1-8B29-44F7372E5ED4}" type="presParOf" srcId="{3864E01A-4732-458C-A7E4-C8D804A0389B}" destId="{C35132EF-1B63-49A9-B24F-8D83F6AC78E8}" srcOrd="4" destOrd="0" presId="urn:microsoft.com/office/officeart/2008/layout/LinedList"/>
+    <dgm:cxn modelId="{21E515BD-F8E8-43FD-949F-17CE09CF3B0B}" type="presParOf" srcId="{3864E01A-4732-458C-A7E4-C8D804A0389B}" destId="{6F4B6D39-E6D9-4B1B-BCA0-3F469DF9A6B1}" srcOrd="5" destOrd="0" presId="urn:microsoft.com/office/officeart/2008/layout/LinedList"/>
     <dgm:cxn modelId="{3A25FA8F-1EBA-47E4-85DB-0A64BAD9AE03}" type="presParOf" srcId="{6F4B6D39-E6D9-4B1B-BCA0-3F469DF9A6B1}" destId="{DFF207D5-F365-444F-9CC7-E6C594A14B1B}" srcOrd="0" destOrd="0" presId="urn:microsoft.com/office/officeart/2008/layout/LinedList"/>
     <dgm:cxn modelId="{91D62EFA-74D5-4A5A-AA2E-C079BE1805B2}" type="presParOf" srcId="{6F4B6D39-E6D9-4B1B-BCA0-3F469DF9A6B1}" destId="{565CA483-617D-4ED4-8260-249D8684425F}" srcOrd="1" destOrd="0" presId="urn:microsoft.com/office/officeart/2008/layout/LinedList"/>
-    <dgm:cxn modelId="{54688775-C2CE-476D-8B84-E672752AF200}" type="presParOf" srcId="{3864E01A-4732-458C-A7E4-C8D804A0389B}" destId="{0D5CEFA3-BEB2-479F-997C-27FBFB20ADC6}" srcOrd="8" destOrd="0" presId="urn:microsoft.com/office/officeart/2008/layout/LinedList"/>
-    <dgm:cxn modelId="{004B3174-7274-4125-8203-26D2187533CE}" type="presParOf" srcId="{3864E01A-4732-458C-A7E4-C8D804A0389B}" destId="{96BBC346-FA44-4ACD-8AD0-CD5D28783017}" srcOrd="9" destOrd="0" presId="urn:microsoft.com/office/officeart/2008/layout/LinedList"/>
+    <dgm:cxn modelId="{54688775-C2CE-476D-8B84-E672752AF200}" type="presParOf" srcId="{3864E01A-4732-458C-A7E4-C8D804A0389B}" destId="{0D5CEFA3-BEB2-479F-997C-27FBFB20ADC6}" srcOrd="6" destOrd="0" presId="urn:microsoft.com/office/officeart/2008/layout/LinedList"/>
+    <dgm:cxn modelId="{004B3174-7274-4125-8203-26D2187533CE}" type="presParOf" srcId="{3864E01A-4732-458C-A7E4-C8D804A0389B}" destId="{96BBC346-FA44-4ACD-8AD0-CD5D28783017}" srcOrd="7" destOrd="0" presId="urn:microsoft.com/office/officeart/2008/layout/LinedList"/>
     <dgm:cxn modelId="{10092362-FB66-477A-B6DD-4CAC79482F24}" type="presParOf" srcId="{96BBC346-FA44-4ACD-8AD0-CD5D28783017}" destId="{C78AF888-B2B8-4AA9-B27F-70EFB4BEE8CF}" srcOrd="0" destOrd="0" presId="urn:microsoft.com/office/officeart/2008/layout/LinedList"/>
     <dgm:cxn modelId="{B5FFD282-F5C7-4654-96B6-83CF7671A967}" type="presParOf" srcId="{96BBC346-FA44-4ACD-8AD0-CD5D28783017}" destId="{8C4BC65B-974C-448E-8D90-9BA7AD5DC01E}" srcOrd="1" destOrd="0" presId="urn:microsoft.com/office/officeart/2008/layout/LinedList"/>
   </dgm:cxnLst>
@@ -1273,7 +1412,7 @@
       </dsp:nvSpPr>
       <dsp:spPr>
         <a:xfrm>
-          <a:off x="0" y="562"/>
+          <a:off x="0" y="0"/>
           <a:ext cx="6046132" cy="0"/>
         </a:xfrm>
         <a:prstGeom prst="line">
@@ -1345,8 +1484,8 @@
       </dsp:nvSpPr>
       <dsp:spPr>
         <a:xfrm>
-          <a:off x="0" y="562"/>
-          <a:ext cx="6046132" cy="920948"/>
+          <a:off x="0" y="0"/>
+          <a:ext cx="6046132" cy="1151466"/>
         </a:xfrm>
         <a:prstGeom prst="rect">
           <a:avLst/>
@@ -1370,12 +1509,12 @@
         <a:fontRef idx="minor"/>
       </dsp:style>
       <dsp:txBody>
-        <a:bodyPr spcFirstLastPara="0" vert="horz" wrap="square" lIns="160020" tIns="160020" rIns="160020" bIns="160020" numCol="1" spcCol="1270" anchor="t" anchorCtr="0">
+        <a:bodyPr spcFirstLastPara="0" vert="horz" wrap="square" lIns="186690" tIns="186690" rIns="186690" bIns="186690" numCol="1" spcCol="1270" anchor="t" anchorCtr="0">
           <a:noAutofit/>
         </a:bodyPr>
         <a:lstStyle/>
         <a:p>
-          <a:pPr marL="0" lvl="0" indent="0" algn="l" defTabSz="1866900">
+          <a:pPr marL="0" lvl="0" indent="0" algn="l" defTabSz="2178050">
             <a:lnSpc>
               <a:spcPct val="90000"/>
             </a:lnSpc>
@@ -1388,15 +1527,15 @@
             <a:buNone/>
           </a:pPr>
           <a:r>
-            <a:rPr lang="nl-NL" sz="4200" kern="1200"/>
+            <a:rPr lang="nl-NL" sz="4900" kern="1200"/>
             <a:t>Afgelopen Sprint</a:t>
           </a:r>
-          <a:endParaRPr lang="en-US" sz="4200" kern="1200"/>
+          <a:endParaRPr lang="en-US" sz="4900" kern="1200"/>
         </a:p>
       </dsp:txBody>
       <dsp:txXfrm>
-        <a:off x="0" y="562"/>
-        <a:ext cx="6046132" cy="920948"/>
+        <a:off x="0" y="0"/>
+        <a:ext cx="6046132" cy="1151466"/>
       </dsp:txXfrm>
     </dsp:sp>
     <dsp:sp modelId="{AFAE369B-725F-4660-958B-1185EC50D468}">
@@ -1406,7 +1545,7 @@
       </dsp:nvSpPr>
       <dsp:spPr>
         <a:xfrm>
-          <a:off x="0" y="921510"/>
+          <a:off x="0" y="1151466"/>
           <a:ext cx="6046132" cy="0"/>
         </a:xfrm>
         <a:prstGeom prst="line">
@@ -1416,9 +1555,9 @@
           <a:gsLst>
             <a:gs pos="0">
               <a:schemeClr val="accent2">
-                <a:hueOff val="-777537"/>
-                <a:satOff val="-4113"/>
-                <a:lumOff val="-1568"/>
+                <a:hueOff val="-1036716"/>
+                <a:satOff val="-5484"/>
+                <a:lumOff val="-2091"/>
                 <a:alphaOff val="0"/>
                 <a:tint val="98000"/>
                 <a:lumMod val="100000"/>
@@ -1426,9 +1565,9 @@
             </a:gs>
             <a:gs pos="100000">
               <a:schemeClr val="accent2">
-                <a:hueOff val="-777537"/>
-                <a:satOff val="-4113"/>
-                <a:lumOff val="-1568"/>
+                <a:hueOff val="-1036716"/>
+                <a:satOff val="-5484"/>
+                <a:lumOff val="-2091"/>
                 <a:alphaOff val="0"/>
                 <a:shade val="88000"/>
                 <a:lumMod val="88000"/>
@@ -1440,9 +1579,9 @@
         <a:ln w="9525" cap="rnd" cmpd="sng" algn="ctr">
           <a:solidFill>
             <a:schemeClr val="accent2">
-              <a:hueOff val="-777537"/>
-              <a:satOff val="-4113"/>
-              <a:lumOff val="-1568"/>
+              <a:hueOff val="-1036716"/>
+              <a:satOff val="-5484"/>
+              <a:lumOff val="-2091"/>
               <a:alphaOff val="0"/>
             </a:schemeClr>
           </a:solidFill>
@@ -1478,8 +1617,8 @@
       </dsp:nvSpPr>
       <dsp:spPr>
         <a:xfrm>
-          <a:off x="0" y="921510"/>
-          <a:ext cx="6046132" cy="920948"/>
+          <a:off x="0" y="1151466"/>
+          <a:ext cx="6046132" cy="1151466"/>
         </a:xfrm>
         <a:prstGeom prst="rect">
           <a:avLst/>
@@ -1503,12 +1642,12 @@
         <a:fontRef idx="minor"/>
       </dsp:style>
       <dsp:txBody>
-        <a:bodyPr spcFirstLastPara="0" vert="horz" wrap="square" lIns="160020" tIns="160020" rIns="160020" bIns="160020" numCol="1" spcCol="1270" anchor="t" anchorCtr="0">
+        <a:bodyPr spcFirstLastPara="0" vert="horz" wrap="square" lIns="186690" tIns="186690" rIns="186690" bIns="186690" numCol="1" spcCol="1270" anchor="t" anchorCtr="0">
           <a:noAutofit/>
         </a:bodyPr>
         <a:lstStyle/>
         <a:p>
-          <a:pPr marL="0" lvl="0" indent="0" algn="l" defTabSz="1866900">
+          <a:pPr marL="0" lvl="0" indent="0" algn="l" defTabSz="2178050">
             <a:lnSpc>
               <a:spcPct val="90000"/>
             </a:lnSpc>
@@ -1521,25 +1660,29 @@
             <a:buNone/>
           </a:pPr>
           <a:r>
-            <a:rPr lang="nl-NL" sz="4200" kern="1200"/>
-            <a:t>Demo’s</a:t>
+            <a:rPr lang="nl-NL" sz="4900" kern="1200" dirty="0"/>
+            <a:t>Voortgang user </a:t>
           </a:r>
-          <a:endParaRPr lang="en-US" sz="4200" kern="1200"/>
+          <a:r>
+            <a:rPr lang="nl-NL" sz="4900" kern="1200" dirty="0" err="1"/>
+            <a:t>stories</a:t>
+          </a:r>
+          <a:endParaRPr lang="en-US" sz="4900" kern="1200" dirty="0"/>
         </a:p>
       </dsp:txBody>
       <dsp:txXfrm>
-        <a:off x="0" y="921510"/>
-        <a:ext cx="6046132" cy="920948"/>
+        <a:off x="0" y="1151466"/>
+        <a:ext cx="6046132" cy="1151466"/>
       </dsp:txXfrm>
     </dsp:sp>
-    <dsp:sp modelId="{CB7E08E1-7F1A-42DF-9E7C-67B68821F510}">
+    <dsp:sp modelId="{C35132EF-1B63-49A9-B24F-8D83F6AC78E8}">
       <dsp:nvSpPr>
         <dsp:cNvPr id="0" name=""/>
         <dsp:cNvSpPr/>
       </dsp:nvSpPr>
       <dsp:spPr>
         <a:xfrm>
-          <a:off x="0" y="1842458"/>
+          <a:off x="0" y="2302933"/>
           <a:ext cx="6046132" cy="0"/>
         </a:xfrm>
         <a:prstGeom prst="line">
@@ -1549,9 +1692,9 @@
           <a:gsLst>
             <a:gs pos="0">
               <a:schemeClr val="accent2">
-                <a:hueOff val="-1555074"/>
-                <a:satOff val="-8227"/>
-                <a:lumOff val="-3137"/>
+                <a:hueOff val="-2073432"/>
+                <a:satOff val="-10969"/>
+                <a:lumOff val="-4183"/>
                 <a:alphaOff val="0"/>
                 <a:tint val="98000"/>
                 <a:lumMod val="100000"/>
@@ -1559,9 +1702,9 @@
             </a:gs>
             <a:gs pos="100000">
               <a:schemeClr val="accent2">
-                <a:hueOff val="-1555074"/>
-                <a:satOff val="-8227"/>
-                <a:lumOff val="-3137"/>
+                <a:hueOff val="-2073432"/>
+                <a:satOff val="-10969"/>
+                <a:lumOff val="-4183"/>
                 <a:alphaOff val="0"/>
                 <a:shade val="88000"/>
                 <a:lumMod val="88000"/>
@@ -1573,142 +1716,9 @@
         <a:ln w="9525" cap="rnd" cmpd="sng" algn="ctr">
           <a:solidFill>
             <a:schemeClr val="accent2">
-              <a:hueOff val="-1555074"/>
-              <a:satOff val="-8227"/>
-              <a:lumOff val="-3137"/>
-              <a:alphaOff val="0"/>
-            </a:schemeClr>
-          </a:solidFill>
-          <a:prstDash val="solid"/>
-        </a:ln>
-        <a:effectLst>
-          <a:outerShdw blurRad="50800" dist="38100" dir="5400000" rotWithShape="0">
-            <a:srgbClr val="000000">
-              <a:alpha val="35000"/>
-            </a:srgbClr>
-          </a:outerShdw>
-        </a:effectLst>
-      </dsp:spPr>
-      <dsp:style>
-        <a:lnRef idx="1">
-          <a:scrgbClr r="0" g="0" b="0"/>
-        </a:lnRef>
-        <a:fillRef idx="3">
-          <a:scrgbClr r="0" g="0" b="0"/>
-        </a:fillRef>
-        <a:effectRef idx="2">
-          <a:scrgbClr r="0" g="0" b="0"/>
-        </a:effectRef>
-        <a:fontRef idx="minor">
-          <a:schemeClr val="lt1"/>
-        </a:fontRef>
-      </dsp:style>
-    </dsp:sp>
-    <dsp:sp modelId="{BB4110CE-082E-4CF5-A870-379EADDF9829}">
-      <dsp:nvSpPr>
-        <dsp:cNvPr id="0" name=""/>
-        <dsp:cNvSpPr/>
-      </dsp:nvSpPr>
-      <dsp:spPr>
-        <a:xfrm>
-          <a:off x="0" y="1842458"/>
-          <a:ext cx="6046132" cy="920948"/>
-        </a:xfrm>
-        <a:prstGeom prst="rect">
-          <a:avLst/>
-        </a:prstGeom>
-        <a:noFill/>
-        <a:ln>
-          <a:noFill/>
-        </a:ln>
-        <a:effectLst/>
-      </dsp:spPr>
-      <dsp:style>
-        <a:lnRef idx="0">
-          <a:scrgbClr r="0" g="0" b="0"/>
-        </a:lnRef>
-        <a:fillRef idx="0">
-          <a:scrgbClr r="0" g="0" b="0"/>
-        </a:fillRef>
-        <a:effectRef idx="0">
-          <a:scrgbClr r="0" g="0" b="0"/>
-        </a:effectRef>
-        <a:fontRef idx="minor"/>
-      </dsp:style>
-      <dsp:txBody>
-        <a:bodyPr spcFirstLastPara="0" vert="horz" wrap="square" lIns="160020" tIns="160020" rIns="160020" bIns="160020" numCol="1" spcCol="1270" anchor="t" anchorCtr="0">
-          <a:noAutofit/>
-        </a:bodyPr>
-        <a:lstStyle/>
-        <a:p>
-          <a:pPr marL="0" lvl="0" indent="0" algn="l" defTabSz="1866900">
-            <a:lnSpc>
-              <a:spcPct val="90000"/>
-            </a:lnSpc>
-            <a:spcBef>
-              <a:spcPct val="0"/>
-            </a:spcBef>
-            <a:spcAft>
-              <a:spcPct val="35000"/>
-            </a:spcAft>
-            <a:buNone/>
-          </a:pPr>
-          <a:r>
-            <a:rPr lang="nl-NL" sz="4200" kern="1200"/>
-            <a:t>Voortgang user stories</a:t>
-          </a:r>
-          <a:endParaRPr lang="en-US" sz="4200" kern="1200"/>
-        </a:p>
-      </dsp:txBody>
-      <dsp:txXfrm>
-        <a:off x="0" y="1842458"/>
-        <a:ext cx="6046132" cy="920948"/>
-      </dsp:txXfrm>
-    </dsp:sp>
-    <dsp:sp modelId="{C35132EF-1B63-49A9-B24F-8D83F6AC78E8}">
-      <dsp:nvSpPr>
-        <dsp:cNvPr id="0" name=""/>
-        <dsp:cNvSpPr/>
-      </dsp:nvSpPr>
-      <dsp:spPr>
-        <a:xfrm>
-          <a:off x="0" y="2763407"/>
-          <a:ext cx="6046132" cy="0"/>
-        </a:xfrm>
-        <a:prstGeom prst="line">
-          <a:avLst/>
-        </a:prstGeom>
-        <a:gradFill rotWithShape="0">
-          <a:gsLst>
-            <a:gs pos="0">
-              <a:schemeClr val="accent2">
-                <a:hueOff val="-2332611"/>
-                <a:satOff val="-12340"/>
-                <a:lumOff val="-4705"/>
-                <a:alphaOff val="0"/>
-                <a:tint val="98000"/>
-                <a:lumMod val="100000"/>
-              </a:schemeClr>
-            </a:gs>
-            <a:gs pos="100000">
-              <a:schemeClr val="accent2">
-                <a:hueOff val="-2332611"/>
-                <a:satOff val="-12340"/>
-                <a:lumOff val="-4705"/>
-                <a:alphaOff val="0"/>
-                <a:shade val="88000"/>
-                <a:lumMod val="88000"/>
-              </a:schemeClr>
-            </a:gs>
-          </a:gsLst>
-          <a:lin ang="5400000" scaled="1"/>
-        </a:gradFill>
-        <a:ln w="9525" cap="rnd" cmpd="sng" algn="ctr">
-          <a:solidFill>
-            <a:schemeClr val="accent2">
-              <a:hueOff val="-2332611"/>
-              <a:satOff val="-12340"/>
-              <a:lumOff val="-4705"/>
+              <a:hueOff val="-2073432"/>
+              <a:satOff val="-10969"/>
+              <a:lumOff val="-4183"/>
               <a:alphaOff val="0"/>
             </a:schemeClr>
           </a:solidFill>
@@ -1744,8 +1754,8 @@
       </dsp:nvSpPr>
       <dsp:spPr>
         <a:xfrm>
-          <a:off x="0" y="2763407"/>
-          <a:ext cx="6046132" cy="920948"/>
+          <a:off x="0" y="2302933"/>
+          <a:ext cx="6046132" cy="1151466"/>
         </a:xfrm>
         <a:prstGeom prst="rect">
           <a:avLst/>
@@ -1769,12 +1779,12 @@
         <a:fontRef idx="minor"/>
       </dsp:style>
       <dsp:txBody>
-        <a:bodyPr spcFirstLastPara="0" vert="horz" wrap="square" lIns="160020" tIns="160020" rIns="160020" bIns="160020" numCol="1" spcCol="1270" anchor="t" anchorCtr="0">
+        <a:bodyPr spcFirstLastPara="0" vert="horz" wrap="square" lIns="186690" tIns="186690" rIns="186690" bIns="186690" numCol="1" spcCol="1270" anchor="t" anchorCtr="0">
           <a:noAutofit/>
         </a:bodyPr>
         <a:lstStyle/>
         <a:p>
-          <a:pPr marL="0" lvl="0" indent="0" algn="l" defTabSz="1866900">
+          <a:pPr marL="0" lvl="0" indent="0" algn="l" defTabSz="2178050">
             <a:lnSpc>
               <a:spcPct val="90000"/>
             </a:lnSpc>
@@ -1787,15 +1797,15 @@
             <a:buNone/>
           </a:pPr>
           <a:r>
-            <a:rPr lang="nl-NL" sz="4200" kern="1200"/>
+            <a:rPr lang="nl-NL" sz="4900" kern="1200" dirty="0" err="1"/>
             <a:t>Retrospective</a:t>
           </a:r>
-          <a:endParaRPr lang="en-US" sz="4200" kern="1200"/>
+          <a:endParaRPr lang="en-US" sz="4900" kern="1200" dirty="0"/>
         </a:p>
       </dsp:txBody>
       <dsp:txXfrm>
-        <a:off x="0" y="2763407"/>
-        <a:ext cx="6046132" cy="920948"/>
+        <a:off x="0" y="2302933"/>
+        <a:ext cx="6046132" cy="1151466"/>
       </dsp:txXfrm>
     </dsp:sp>
     <dsp:sp modelId="{0D5CEFA3-BEB2-479F-997C-27FBFB20ADC6}">
@@ -1805,7 +1815,7 @@
       </dsp:nvSpPr>
       <dsp:spPr>
         <a:xfrm>
-          <a:off x="0" y="3684355"/>
+          <a:off x="0" y="3454399"/>
           <a:ext cx="6046132" cy="0"/>
         </a:xfrm>
         <a:prstGeom prst="line">
@@ -1877,8 +1887,8 @@
       </dsp:nvSpPr>
       <dsp:spPr>
         <a:xfrm>
-          <a:off x="0" y="3684355"/>
-          <a:ext cx="6046132" cy="920948"/>
+          <a:off x="0" y="3454399"/>
+          <a:ext cx="6046132" cy="1151466"/>
         </a:xfrm>
         <a:prstGeom prst="rect">
           <a:avLst/>
@@ -1902,12 +1912,12 @@
         <a:fontRef idx="minor"/>
       </dsp:style>
       <dsp:txBody>
-        <a:bodyPr spcFirstLastPara="0" vert="horz" wrap="square" lIns="160020" tIns="160020" rIns="160020" bIns="160020" numCol="1" spcCol="1270" anchor="t" anchorCtr="0">
+        <a:bodyPr spcFirstLastPara="0" vert="horz" wrap="square" lIns="186690" tIns="186690" rIns="186690" bIns="186690" numCol="1" spcCol="1270" anchor="t" anchorCtr="0">
           <a:noAutofit/>
         </a:bodyPr>
         <a:lstStyle/>
         <a:p>
-          <a:pPr marL="0" lvl="0" indent="0" algn="l" defTabSz="1866900">
+          <a:pPr marL="0" lvl="0" indent="0" algn="l" defTabSz="2178050">
             <a:lnSpc>
               <a:spcPct val="90000"/>
             </a:lnSpc>
@@ -1920,15 +1930,15 @@
             <a:buNone/>
           </a:pPr>
           <a:r>
-            <a:rPr lang="nl-NL" sz="4200" kern="1200"/>
+            <a:rPr lang="nl-NL" sz="4900" kern="1200" dirty="0"/>
             <a:t>Volgende Sprint</a:t>
           </a:r>
-          <a:endParaRPr lang="en-US" sz="4200" kern="1200"/>
+          <a:endParaRPr lang="en-US" sz="4900" kern="1200" dirty="0"/>
         </a:p>
       </dsp:txBody>
       <dsp:txXfrm>
-        <a:off x="0" y="3684355"/>
-        <a:ext cx="6046132" cy="920948"/>
+        <a:off x="0" y="3454399"/>
+        <a:ext cx="6046132" cy="1151466"/>
       </dsp:txXfrm>
     </dsp:sp>
   </dsp:spTree>
@@ -3716,7 +3726,7 @@
           <a:p>
             <a:fld id="{D5EC4132-83FF-430E-8473-4C6C1D8D7455}" type="slidenum">
               <a:rPr lang="nl-NL" smtClean="0"/>
-              <a:t>‹#›</a:t>
+              <a:t>‹nr.›</a:t>
             </a:fld>
             <a:endParaRPr lang="nl-NL"/>
           </a:p>
@@ -4040,7 +4050,7 @@
           <a:p>
             <a:fld id="{D5EC4132-83FF-430E-8473-4C6C1D8D7455}" type="slidenum">
               <a:rPr lang="nl-NL" smtClean="0"/>
-              <a:t>‹#›</a:t>
+              <a:t>‹nr.›</a:t>
             </a:fld>
             <a:endParaRPr lang="nl-NL"/>
           </a:p>
@@ -4318,7 +4328,7 @@
           <a:p>
             <a:fld id="{D5EC4132-83FF-430E-8473-4C6C1D8D7455}" type="slidenum">
               <a:rPr lang="nl-NL" smtClean="0"/>
-              <a:t>‹#›</a:t>
+              <a:t>‹nr.›</a:t>
             </a:fld>
             <a:endParaRPr lang="nl-NL"/>
           </a:p>
@@ -4886,7 +4896,7 @@
           <a:p>
             <a:fld id="{D5EC4132-83FF-430E-8473-4C6C1D8D7455}" type="slidenum">
               <a:rPr lang="nl-NL" smtClean="0"/>
-              <a:t>‹#›</a:t>
+              <a:t>‹nr.›</a:t>
             </a:fld>
             <a:endParaRPr lang="nl-NL"/>
           </a:p>
@@ -5164,7 +5174,7 @@
           <a:p>
             <a:fld id="{D5EC4132-83FF-430E-8473-4C6C1D8D7455}" type="slidenum">
               <a:rPr lang="nl-NL" smtClean="0"/>
-              <a:t>‹#›</a:t>
+              <a:t>‹nr.›</a:t>
             </a:fld>
             <a:endParaRPr lang="nl-NL"/>
           </a:p>
@@ -5726,7 +5736,7 @@
           <a:p>
             <a:fld id="{D5EC4132-83FF-430E-8473-4C6C1D8D7455}" type="slidenum">
               <a:rPr lang="nl-NL" smtClean="0"/>
-              <a:t>‹#›</a:t>
+              <a:t>‹nr.›</a:t>
             </a:fld>
             <a:endParaRPr lang="nl-NL"/>
           </a:p>
@@ -6053,7 +6063,7 @@
           <a:p>
             <a:fld id="{D5EC4132-83FF-430E-8473-4C6C1D8D7455}" type="slidenum">
               <a:rPr lang="nl-NL" smtClean="0"/>
-              <a:t>‹#›</a:t>
+              <a:t>‹nr.›</a:t>
             </a:fld>
             <a:endParaRPr lang="nl-NL"/>
           </a:p>
@@ -6230,7 +6240,7 @@
           <a:p>
             <a:fld id="{D5EC4132-83FF-430E-8473-4C6C1D8D7455}" type="slidenum">
               <a:rPr lang="nl-NL" smtClean="0"/>
-              <a:t>‹#›</a:t>
+              <a:t>‹nr.›</a:t>
             </a:fld>
             <a:endParaRPr lang="nl-NL"/>
           </a:p>
@@ -6468,7 +6478,7 @@
           <a:p>
             <a:fld id="{D5EC4132-83FF-430E-8473-4C6C1D8D7455}" type="slidenum">
               <a:rPr lang="nl-NL" smtClean="0"/>
-              <a:t>‹#›</a:t>
+              <a:t>‹nr.›</a:t>
             </a:fld>
             <a:endParaRPr lang="nl-NL"/>
           </a:p>
@@ -6668,7 +6678,7 @@
           <a:p>
             <a:fld id="{D5EC4132-83FF-430E-8473-4C6C1D8D7455}" type="slidenum">
               <a:rPr lang="nl-NL" smtClean="0"/>
-              <a:t>‹#›</a:t>
+              <a:t>‹nr.›</a:t>
             </a:fld>
             <a:endParaRPr lang="nl-NL"/>
           </a:p>
@@ -6944,7 +6954,7 @@
           <a:p>
             <a:fld id="{D5EC4132-83FF-430E-8473-4C6C1D8D7455}" type="slidenum">
               <a:rPr lang="nl-NL" smtClean="0"/>
-              <a:t>‹#›</a:t>
+              <a:t>‹nr.›</a:t>
             </a:fld>
             <a:endParaRPr lang="nl-NL"/>
           </a:p>
@@ -7210,7 +7220,7 @@
           <a:p>
             <a:fld id="{D5EC4132-83FF-430E-8473-4C6C1D8D7455}" type="slidenum">
               <a:rPr lang="nl-NL" smtClean="0"/>
-              <a:t>‹#›</a:t>
+              <a:t>‹nr.›</a:t>
             </a:fld>
             <a:endParaRPr lang="nl-NL"/>
           </a:p>
@@ -7584,7 +7594,7 @@
           <a:p>
             <a:fld id="{D5EC4132-83FF-430E-8473-4C6C1D8D7455}" type="slidenum">
               <a:rPr lang="nl-NL" smtClean="0"/>
-              <a:t>‹#›</a:t>
+              <a:t>‹nr.›</a:t>
             </a:fld>
             <a:endParaRPr lang="nl-NL"/>
           </a:p>
@@ -7732,7 +7742,7 @@
           <a:p>
             <a:fld id="{D5EC4132-83FF-430E-8473-4C6C1D8D7455}" type="slidenum">
               <a:rPr lang="nl-NL" smtClean="0"/>
-              <a:t>‹#›</a:t>
+              <a:t>‹nr.›</a:t>
             </a:fld>
             <a:endParaRPr lang="nl-NL"/>
           </a:p>
@@ -7857,7 +7867,7 @@
           <a:p>
             <a:fld id="{D5EC4132-83FF-430E-8473-4C6C1D8D7455}" type="slidenum">
               <a:rPr lang="nl-NL" smtClean="0"/>
-              <a:t>‹#›</a:t>
+              <a:t>‹nr.›</a:t>
             </a:fld>
             <a:endParaRPr lang="nl-NL"/>
           </a:p>
@@ -8142,7 +8152,7 @@
           <a:p>
             <a:fld id="{D5EC4132-83FF-430E-8473-4C6C1D8D7455}" type="slidenum">
               <a:rPr lang="nl-NL" smtClean="0"/>
-              <a:t>‹#›</a:t>
+              <a:t>‹nr.›</a:t>
             </a:fld>
             <a:endParaRPr lang="nl-NL"/>
           </a:p>
@@ -8466,7 +8476,7 @@
           <a:p>
             <a:fld id="{D5EC4132-83FF-430E-8473-4C6C1D8D7455}" type="slidenum">
               <a:rPr lang="nl-NL" smtClean="0"/>
-              <a:t>‹#›</a:t>
+              <a:t>‹nr.›</a:t>
             </a:fld>
             <a:endParaRPr lang="nl-NL"/>
           </a:p>
@@ -8716,7 +8726,7 @@
           <a:p>
             <a:fld id="{D5EC4132-83FF-430E-8473-4C6C1D8D7455}" type="slidenum">
               <a:rPr lang="nl-NL" smtClean="0"/>
-              <a:t>‹#›</a:t>
+              <a:t>‹nr.›</a:t>
             </a:fld>
             <a:endParaRPr lang="nl-NL"/>
           </a:p>
@@ -9447,6 +9457,15 @@
 <file path=ppt/slides/slide12.xml><?xml version="1.0" encoding="utf-8"?>
 <p:sld xmlns:a="http://schemas.openxmlformats.org/drawingml/2006/main" xmlns:r="http://schemas.openxmlformats.org/officeDocument/2006/relationships" xmlns:p="http://schemas.openxmlformats.org/presentationml/2006/main">
   <p:cSld>
+    <p:bg>
+      <p:bgPr>
+        <a:blipFill>
+          <a:blip r:embed="rId2"/>
+          <a:stretch/>
+        </a:blipFill>
+        <a:effectLst/>
+      </p:bgPr>
+    </p:bg>
     <p:spTree>
       <p:nvGrpSpPr>
         <p:cNvPr id="1" name=""/>
@@ -9461,6 +9480,51 @@
           <a:chExt cx="0" cy="0"/>
         </a:xfrm>
       </p:grpSpPr>
+      <p:pic>
+        <p:nvPicPr>
+          <p:cNvPr id="14" name="Picture 8">
+            <a:extLst>
+              <a:ext uri="{FF2B5EF4-FFF2-40B4-BE49-F238E27FC236}">
+                <a16:creationId xmlns:a16="http://schemas.microsoft.com/office/drawing/2014/main" id="{6AF6706C-CF07-43A1-BCC4-CBA5D33820DA}"/>
+              </a:ext>
+              <a:ext uri="{C183D7F6-B498-43B3-948B-1728B52AA6E4}">
+                <adec:decorative xmlns:adec="http://schemas.microsoft.com/office/drawing/2017/decorative" val="1"/>
+              </a:ext>
+            </a:extLst>
+          </p:cNvPr>
+          <p:cNvPicPr>
+            <a:picLocks noGrp="1" noRot="1" noChangeAspect="1" noMove="1" noResize="1" noEditPoints="1" noAdjustHandles="1" noChangeArrowheads="1" noChangeShapeType="1" noCrop="1"/>
+          </p:cNvPicPr>
+          <p:nvPr>
+            <p:extLst>
+              <p:ext uri="{386F3935-93C4-4BCD-93E2-E3B085C9AB24}">
+                <p16:designElem xmlns:p16="http://schemas.microsoft.com/office/powerpoint/2015/main" val="1"/>
+              </p:ext>
+            </p:extLst>
+          </p:nvPr>
+        </p:nvPicPr>
+        <p:blipFill>
+          <a:blip r:embed="rId3">
+            <a:extLst>
+              <a:ext uri="{28A0092B-C50C-407E-A947-70E740481C1C}">
+                <a14:useLocalDpi xmlns:a14="http://schemas.microsoft.com/office/drawing/2010/main" val="0"/>
+              </a:ext>
+            </a:extLst>
+          </a:blip>
+          <a:stretch>
+            <a:fillRect/>
+          </a:stretch>
+        </p:blipFill>
+        <p:spPr>
+          <a:xfrm>
+            <a:off x="0" y="0"/>
+            <a:ext cx="12188825" cy="6856214"/>
+          </a:xfrm>
+          <a:prstGeom prst="rect">
+            <a:avLst/>
+          </a:prstGeom>
+        </p:spPr>
+      </p:pic>
       <p:sp>
         <p:nvSpPr>
           <p:cNvPr id="2" name="Title 1">
@@ -9477,43 +9541,93 @@
             <p:ph type="title"/>
           </p:nvPr>
         </p:nvSpPr>
-        <p:spPr/>
-        <p:txBody>
-          <a:bodyPr/>
+        <p:spPr>
+          <a:xfrm>
+            <a:off x="643464" y="639097"/>
+            <a:ext cx="4789678" cy="3746634"/>
+          </a:xfrm>
+        </p:spPr>
+        <p:txBody>
+          <a:bodyPr vert="horz" lIns="91440" tIns="45720" rIns="91440" bIns="45720" rtlCol="0" anchor="b">
+            <a:normAutofit/>
+          </a:bodyPr>
           <a:lstStyle/>
           <a:p>
-            <a:r>
-              <a:rPr lang="nl-NL" dirty="0"/>
+            <a:pPr algn="r"/>
+            <a:r>
+              <a:rPr lang="en-US" sz="4800"/>
               <a:t>Vragen?</a:t>
             </a:r>
           </a:p>
         </p:txBody>
       </p:sp>
-      <p:sp>
-        <p:nvSpPr>
-          <p:cNvPr id="3" name="Content Placeholder 2">
+      <p:pic>
+        <p:nvPicPr>
+          <p:cNvPr id="15" name="Graphic 14" descr="Hulp dun">
             <a:extLst>
               <a:ext uri="{FF2B5EF4-FFF2-40B4-BE49-F238E27FC236}">
-                <a16:creationId xmlns:a16="http://schemas.microsoft.com/office/drawing/2014/main" id="{768CC878-EE76-9B51-B735-FB5D5DFB94BA}"/>
+                <a16:creationId xmlns:a16="http://schemas.microsoft.com/office/drawing/2014/main" id="{6D8AFA5B-3EBC-07DF-350D-E4D5F5C9BD38}"/>
               </a:ext>
             </a:extLst>
           </p:cNvPr>
-          <p:cNvSpPr>
-            <a:spLocks noGrp="1"/>
-          </p:cNvSpPr>
-          <p:nvPr>
-            <p:ph idx="1"/>
-          </p:nvPr>
-        </p:nvSpPr>
-        <p:spPr/>
-        <p:txBody>
-          <a:bodyPr/>
-          <a:lstStyle/>
-          <a:p>
-            <a:endParaRPr lang="nl-NL" dirty="0"/>
-          </a:p>
-        </p:txBody>
-      </p:sp>
+          <p:cNvPicPr>
+            <a:picLocks noChangeAspect="1"/>
+          </p:cNvPicPr>
+          <p:nvPr/>
+        </p:nvPicPr>
+        <p:blipFill>
+          <a:blip r:embed="rId4">
+            <a:extLst>
+              <a:ext uri="{28A0092B-C50C-407E-A947-70E740481C1C}">
+                <a14:useLocalDpi xmlns:a14="http://schemas.microsoft.com/office/drawing/2010/main" val="0"/>
+              </a:ext>
+              <a:ext uri="{96DAC541-7B7A-43D3-8B79-37D633B846F1}">
+                <asvg:svgBlip xmlns:asvg="http://schemas.microsoft.com/office/drawing/2016/SVG/main" r:embed="rId5"/>
+              </a:ext>
+            </a:extLst>
+          </a:blip>
+          <a:stretch>
+            <a:fillRect/>
+          </a:stretch>
+        </p:blipFill>
+        <p:spPr>
+          <a:xfrm>
+            <a:off x="6076606" y="690853"/>
+            <a:ext cx="5471927" cy="5471927"/>
+          </a:xfrm>
+          <a:prstGeom prst="roundRect">
+            <a:avLst>
+              <a:gd name="adj" fmla="val 4380"/>
+            </a:avLst>
+          </a:prstGeom>
+          <a:ln w="50800" cap="sq" cmpd="dbl">
+            <a:gradFill flip="none" rotWithShape="1">
+              <a:gsLst>
+                <a:gs pos="0">
+                  <a:srgbClr val="FFFFFF"/>
+                </a:gs>
+                <a:gs pos="100000">
+                  <a:schemeClr val="tx1">
+                    <a:alpha val="0"/>
+                  </a:schemeClr>
+                </a:gs>
+              </a:gsLst>
+              <a:path path="circle">
+                <a:fillToRect l="50000" t="50000" r="50000" b="50000"/>
+              </a:path>
+              <a:tileRect/>
+            </a:gradFill>
+            <a:miter lim="800000"/>
+          </a:ln>
+          <a:effectLst>
+            <a:outerShdw blurRad="254000" algn="tl" rotWithShape="0">
+              <a:srgbClr val="000000">
+                <a:alpha val="43000"/>
+              </a:srgbClr>
+            </a:outerShdw>
+          </a:effectLst>
+        </p:spPr>
+      </p:pic>
     </p:spTree>
     <p:extLst>
       <p:ext uri="{BB962C8B-B14F-4D97-AF65-F5344CB8AC3E}">
@@ -9764,6 +9878,11 @@
           </p:cNvGraphicFramePr>
           <p:nvPr>
             <p:ph idx="1"/>
+            <p:extLst>
+              <p:ext uri="{D42A27DB-BD31-4B8C-83A1-F6EECF244321}">
+                <p14:modId xmlns:p14="http://schemas.microsoft.com/office/powerpoint/2010/main" val="3881564860"/>
+              </p:ext>
+            </p:extLst>
           </p:nvPr>
         </p:nvGraphicFramePr>
         <p:xfrm>
@@ -9868,66 +9987,6 @@
             <a:r>
               <a:rPr lang="nl-NL" dirty="0"/>
               <a:t>Eerste tests uitgevoerd waterdichtheid</a:t>
-            </a:r>
-          </a:p>
-          <a:p>
-            <a:r>
-              <a:rPr lang="nl-NL" dirty="0"/>
-              <a:t>(Daarna slides aanmaken gebaseerd op hoeveel uitleg er nodig is)</a:t>
-            </a:r>
-            <a:br>
-              <a:rPr lang="nl-NL" dirty="0"/>
-            </a:br>
-            <a:r>
-              <a:rPr lang="nl-NL" dirty="0"/>
-              <a:t>(In de volgende uitbreidings-slides user </a:t>
-            </a:r>
-            <a:r>
-              <a:rPr lang="nl-NL" dirty="0" err="1"/>
-              <a:t>stories</a:t>
-            </a:r>
-            <a:r>
-              <a:rPr lang="nl-NL" dirty="0"/>
-              <a:t> meenemen)</a:t>
-            </a:r>
-            <a:br>
-              <a:rPr lang="nl-NL" dirty="0"/>
-            </a:br>
-            <a:r>
-              <a:rPr lang="nl-NL" dirty="0"/>
-              <a:t>(In de volgende slides de </a:t>
-            </a:r>
-            <a:r>
-              <a:rPr lang="nl-NL" dirty="0" err="1"/>
-              <a:t>requirements</a:t>
-            </a:r>
-            <a:r>
-              <a:rPr lang="nl-NL" dirty="0"/>
-              <a:t>/user </a:t>
-            </a:r>
-            <a:r>
-              <a:rPr lang="nl-NL" dirty="0" err="1"/>
-              <a:t>stories</a:t>
-            </a:r>
-            <a:r>
-              <a:rPr lang="nl-NL" dirty="0"/>
-              <a:t> </a:t>
-            </a:r>
-            <a:r>
-              <a:rPr lang="nl-NL" dirty="0" err="1"/>
-              <a:t>kopieren</a:t>
-            </a:r>
-            <a:r>
-              <a:rPr lang="nl-NL" dirty="0"/>
-              <a:t> uit product </a:t>
-            </a:r>
-            <a:r>
-              <a:rPr lang="nl-NL" dirty="0" err="1"/>
-              <a:t>backlog</a:t>
-            </a:r>
-            <a:r>
-              <a:rPr lang="nl-NL" dirty="0"/>
-              <a:t>, incl. acceptatiecriteria etc.)</a:t>
             </a:r>
           </a:p>
         </p:txBody>
@@ -10195,6 +10254,15 @@
 <file path=ppt/slides/slide7.xml><?xml version="1.0" encoding="utf-8"?>
 <p:sld xmlns:a="http://schemas.openxmlformats.org/drawingml/2006/main" xmlns:r="http://schemas.openxmlformats.org/officeDocument/2006/relationships" xmlns:p="http://schemas.openxmlformats.org/presentationml/2006/main">
   <p:cSld>
+    <p:bg>
+      <p:bgPr>
+        <a:blipFill>
+          <a:blip r:embed="rId2"/>
+          <a:stretch/>
+        </a:blipFill>
+        <a:effectLst/>
+      </p:bgPr>
+    </p:bg>
     <p:spTree>
       <p:nvGrpSpPr>
         <p:cNvPr id="1" name=""/>
@@ -10209,52 +10277,31 @@
           <a:chExt cx="0" cy="0"/>
         </a:xfrm>
       </p:grpSpPr>
-      <p:sp>
-        <p:nvSpPr>
-          <p:cNvPr id="2" name="Title 1">
+      <p:pic>
+        <p:nvPicPr>
+          <p:cNvPr id="11" name="Picture 10">
             <a:extLst>
               <a:ext uri="{FF2B5EF4-FFF2-40B4-BE49-F238E27FC236}">
-                <a16:creationId xmlns:a16="http://schemas.microsoft.com/office/drawing/2014/main" id="{AE154AE4-5C95-62BE-2D21-723C585804C9}"/>
+                <a16:creationId xmlns:a16="http://schemas.microsoft.com/office/drawing/2014/main" id="{6AF6706C-CF07-43A1-BCC4-CBA5D33820DA}"/>
               </a:ext>
-            </a:extLst>
-          </p:cNvPr>
-          <p:cNvSpPr>
-            <a:spLocks noGrp="1"/>
-          </p:cNvSpPr>
-          <p:nvPr>
-            <p:ph type="title"/>
-          </p:nvPr>
-        </p:nvSpPr>
-        <p:spPr/>
-        <p:txBody>
-          <a:bodyPr/>
-          <a:lstStyle/>
-          <a:p>
-            <a:r>
-              <a:rPr lang="nl-NL" dirty="0"/>
-              <a:t>Poster</a:t>
-            </a:r>
-          </a:p>
-        </p:txBody>
-      </p:sp>
-      <p:pic>
-        <p:nvPicPr>
-          <p:cNvPr id="6" name="Content Placeholder 5" descr="A black and white logo&#10;&#10;AI-generated content may be incorrect.">
-            <a:extLst>
-              <a:ext uri="{FF2B5EF4-FFF2-40B4-BE49-F238E27FC236}">
-                <a16:creationId xmlns:a16="http://schemas.microsoft.com/office/drawing/2014/main" id="{8F3450A3-0336-6B3F-4878-0397B7DA9310}"/>
+              <a:ext uri="{C183D7F6-B498-43B3-948B-1728B52AA6E4}">
+                <adec:decorative xmlns:adec="http://schemas.microsoft.com/office/drawing/2017/decorative" val="1"/>
               </a:ext>
             </a:extLst>
           </p:cNvPr>
           <p:cNvPicPr>
-            <a:picLocks noGrp="1" noChangeAspect="1"/>
+            <a:picLocks noGrp="1" noRot="1" noChangeAspect="1" noMove="1" noResize="1" noEditPoints="1" noAdjustHandles="1" noChangeArrowheads="1" noChangeShapeType="1" noCrop="1"/>
           </p:cNvPicPr>
           <p:nvPr>
-            <p:ph idx="1"/>
+            <p:extLst>
+              <p:ext uri="{386F3935-93C4-4BCD-93E2-E3B085C9AB24}">
+                <p16:designElem xmlns:p16="http://schemas.microsoft.com/office/powerpoint/2015/main" val="1"/>
+              </p:ext>
+            </p:extLst>
           </p:nvPr>
         </p:nvPicPr>
         <p:blipFill>
-          <a:blip r:embed="rId2">
+          <a:blip r:embed="rId3">
             <a:extLst>
               <a:ext uri="{28A0092B-C50C-407E-A947-70E740481C1C}">
                 <a14:useLocalDpi xmlns:a14="http://schemas.microsoft.com/office/drawing/2010/main" val="0"/>
@@ -10267,9 +10314,113 @@
         </p:blipFill>
         <p:spPr>
           <a:xfrm>
-            <a:off x="2903516" y="-66799"/>
-            <a:ext cx="4661065" cy="6991598"/>
+            <a:off x="0" y="0"/>
+            <a:ext cx="12188825" cy="6856214"/>
           </a:xfrm>
+          <a:prstGeom prst="rect">
+            <a:avLst/>
+          </a:prstGeom>
+        </p:spPr>
+      </p:pic>
+      <p:sp>
+        <p:nvSpPr>
+          <p:cNvPr id="2" name="Title 1">
+            <a:extLst>
+              <a:ext uri="{FF2B5EF4-FFF2-40B4-BE49-F238E27FC236}">
+                <a16:creationId xmlns:a16="http://schemas.microsoft.com/office/drawing/2014/main" id="{AE154AE4-5C95-62BE-2D21-723C585804C9}"/>
+              </a:ext>
+            </a:extLst>
+          </p:cNvPr>
+          <p:cNvSpPr>
+            <a:spLocks noGrp="1"/>
+          </p:cNvSpPr>
+          <p:nvPr>
+            <p:ph type="title"/>
+          </p:nvPr>
+        </p:nvSpPr>
+        <p:spPr>
+          <a:xfrm>
+            <a:off x="643464" y="639097"/>
+            <a:ext cx="4789678" cy="3746634"/>
+          </a:xfrm>
+        </p:spPr>
+        <p:txBody>
+          <a:bodyPr vert="horz" lIns="91440" tIns="45720" rIns="91440" bIns="45720" rtlCol="0" anchor="b">
+            <a:normAutofit/>
+          </a:bodyPr>
+          <a:lstStyle/>
+          <a:p>
+            <a:pPr algn="r"/>
+            <a:r>
+              <a:rPr lang="en-US" sz="4800" dirty="0"/>
+              <a:t>Poster</a:t>
+            </a:r>
+          </a:p>
+        </p:txBody>
+      </p:sp>
+      <p:pic>
+        <p:nvPicPr>
+          <p:cNvPr id="6" name="Content Placeholder 5" descr="A black and white logo&#10;&#10;AI-generated content may be incorrect.">
+            <a:extLst>
+              <a:ext uri="{FF2B5EF4-FFF2-40B4-BE49-F238E27FC236}">
+                <a16:creationId xmlns:a16="http://schemas.microsoft.com/office/drawing/2014/main" id="{8F3450A3-0336-6B3F-4878-0397B7DA9310}"/>
+              </a:ext>
+            </a:extLst>
+          </p:cNvPr>
+          <p:cNvPicPr>
+            <a:picLocks noChangeAspect="1"/>
+          </p:cNvPicPr>
+          <p:nvPr/>
+        </p:nvPicPr>
+        <p:blipFill>
+          <a:blip r:embed="rId4">
+            <a:extLst>
+              <a:ext uri="{28A0092B-C50C-407E-A947-70E740481C1C}">
+                <a14:useLocalDpi xmlns:a14="http://schemas.microsoft.com/office/drawing/2010/main" val="0"/>
+              </a:ext>
+            </a:extLst>
+          </a:blip>
+          <a:srcRect t="593" r="-1" b="662"/>
+          <a:stretch>
+            <a:fillRect/>
+          </a:stretch>
+        </p:blipFill>
+        <p:spPr>
+          <a:xfrm>
+            <a:off x="6928099" y="639097"/>
+            <a:ext cx="3768941" cy="5575439"/>
+          </a:xfrm>
+          <a:prstGeom prst="roundRect">
+            <a:avLst>
+              <a:gd name="adj" fmla="val 4380"/>
+            </a:avLst>
+          </a:prstGeom>
+          <a:ln w="50800" cap="sq" cmpd="dbl">
+            <a:gradFill flip="none" rotWithShape="1">
+              <a:gsLst>
+                <a:gs pos="0">
+                  <a:srgbClr val="FFFFFF"/>
+                </a:gs>
+                <a:gs pos="100000">
+                  <a:schemeClr val="tx1">
+                    <a:alpha val="0"/>
+                  </a:schemeClr>
+                </a:gs>
+              </a:gsLst>
+              <a:path path="circle">
+                <a:fillToRect l="50000" t="50000" r="50000" b="50000"/>
+              </a:path>
+              <a:tileRect/>
+            </a:gradFill>
+            <a:miter lim="800000"/>
+          </a:ln>
+          <a:effectLst>
+            <a:outerShdw blurRad="254000" algn="tl" rotWithShape="0">
+              <a:srgbClr val="000000">
+                <a:alpha val="43000"/>
+              </a:srgbClr>
+            </a:outerShdw>
+          </a:effectLst>
         </p:spPr>
       </p:pic>
     </p:spTree>
@@ -10733,11 +10884,12 @@
 </file>
 
 <file path=customXml/item1.xml><?xml version="1.0" encoding="utf-8"?>
-<p:properties xmlns:p="http://schemas.microsoft.com/office/2006/metadata/properties" xmlns:xsi="http://www.w3.org/2001/XMLSchema-instance" xmlns:pc="http://schemas.microsoft.com/office/infopath/2007/PartnerControls">
-  <documentManagement>
-    <_activity xmlns="8d5dcd13-9b93-4860-8686-258dec0e23be" xsi:nil="true"/>
-  </documentManagement>
-</p:properties>
+<?mso-contentType ?>
+<FormTemplates xmlns="http://schemas.microsoft.com/sharepoint/v3/contenttype/forms">
+  <Display>DocumentLibraryForm</Display>
+  <Edit>DocumentLibraryForm</Edit>
+  <New>DocumentLibraryForm</New>
+</FormTemplates>
 </file>
 
 <file path=customXml/item2.xml><?xml version="1.0" encoding="utf-8"?>
@@ -10935,26 +11087,17 @@
 </file>
 
 <file path=customXml/item3.xml><?xml version="1.0" encoding="utf-8"?>
-<?mso-contentType ?>
-<FormTemplates xmlns="http://schemas.microsoft.com/sharepoint/v3/contenttype/forms">
-  <Display>DocumentLibraryForm</Display>
-  <Edit>DocumentLibraryForm</Edit>
-  <New>DocumentLibraryForm</New>
-</FormTemplates>
+<p:properties xmlns:p="http://schemas.microsoft.com/office/2006/metadata/properties" xmlns:xsi="http://www.w3.org/2001/XMLSchema-instance" xmlns:pc="http://schemas.microsoft.com/office/infopath/2007/PartnerControls">
+  <documentManagement>
+    <_activity xmlns="8d5dcd13-9b93-4860-8686-258dec0e23be" xsi:nil="true"/>
+  </documentManagement>
+</p:properties>
 </file>
 
 <file path=customXml/itemProps1.xml><?xml version="1.0" encoding="utf-8"?>
-<ds:datastoreItem xmlns:ds="http://schemas.openxmlformats.org/officeDocument/2006/customXml" ds:itemID="{6BE63DC0-0E79-4D45-AB99-081F8145E24C}">
+<ds:datastoreItem xmlns:ds="http://schemas.openxmlformats.org/officeDocument/2006/customXml" ds:itemID="{33D4CFAA-434D-4462-B62D-1E23E4045646}">
   <ds:schemaRefs>
-    <ds:schemaRef ds:uri="http://purl.org/dc/terms/"/>
-    <ds:schemaRef ds:uri="http://schemas.microsoft.com/office/infopath/2007/PartnerControls"/>
-    <ds:schemaRef ds:uri="http://schemas.openxmlformats.org/package/2006/metadata/core-properties"/>
-    <ds:schemaRef ds:uri="http://purl.org/dc/elements/1.1/"/>
-    <ds:schemaRef ds:uri="http://schemas.microsoft.com/office/2006/documentManagement/types"/>
-    <ds:schemaRef ds:uri="http://www.w3.org/XML/1998/namespace"/>
-    <ds:schemaRef ds:uri="8d5dcd13-9b93-4860-8686-258dec0e23be"/>
-    <ds:schemaRef ds:uri="http://schemas.microsoft.com/office/2006/metadata/properties"/>
-    <ds:schemaRef ds:uri="http://purl.org/dc/dcmitype/"/>
+    <ds:schemaRef ds:uri="http://schemas.microsoft.com/sharepoint/v3/contenttype/forms"/>
   </ds:schemaRefs>
 </ds:datastoreItem>
 </file>
@@ -10978,9 +11121,17 @@
 </file>
 
 <file path=customXml/itemProps3.xml><?xml version="1.0" encoding="utf-8"?>
-<ds:datastoreItem xmlns:ds="http://schemas.openxmlformats.org/officeDocument/2006/customXml" ds:itemID="{33D4CFAA-434D-4462-B62D-1E23E4045646}">
+<ds:datastoreItem xmlns:ds="http://schemas.openxmlformats.org/officeDocument/2006/customXml" ds:itemID="{6BE63DC0-0E79-4D45-AB99-081F8145E24C}">
   <ds:schemaRefs>
-    <ds:schemaRef ds:uri="http://schemas.microsoft.com/sharepoint/v3/contenttype/forms"/>
+    <ds:schemaRef ds:uri="http://purl.org/dc/terms/"/>
+    <ds:schemaRef ds:uri="http://schemas.microsoft.com/office/infopath/2007/PartnerControls"/>
+    <ds:schemaRef ds:uri="http://schemas.openxmlformats.org/package/2006/metadata/core-properties"/>
+    <ds:schemaRef ds:uri="http://purl.org/dc/elements/1.1/"/>
+    <ds:schemaRef ds:uri="http://schemas.microsoft.com/office/2006/documentManagement/types"/>
+    <ds:schemaRef ds:uri="http://www.w3.org/XML/1998/namespace"/>
+    <ds:schemaRef ds:uri="8d5dcd13-9b93-4860-8686-258dec0e23be"/>
+    <ds:schemaRef ds:uri="http://schemas.microsoft.com/office/2006/metadata/properties"/>
+    <ds:schemaRef ds:uri="http://purl.org/dc/dcmitype/"/>
   </ds:schemaRefs>
 </ds:datastoreItem>
 </file>